--- a/Material/präsentation_slarachare_games.pptx
+++ b/Material/präsentation_slarachare_games.pptx
@@ -6,6 +6,9 @@
   </p:sldMasterIdLst>
   <p:sldIdLst>
     <p:sldId id="256" r:id="rId2"/>
+    <p:sldId id="258" r:id="rId3"/>
+    <p:sldId id="259" r:id="rId4"/>
+    <p:sldId id="260" r:id="rId5"/>
   </p:sldIdLst>
   <p:sldSz cx="12192000" cy="6858000"/>
   <p:notesSz cx="6858000" cy="9144000"/>
@@ -104,6 +107,11 @@
       </a:defRPr>
     </a:lvl9pPr>
   </p:defaultTextStyle>
+  <p:extLst>
+    <p:ext uri="{EFAFB233-063F-42B5-8137-9DF3F51BA10A}">
+      <p15:sldGuideLst xmlns:p15="http://schemas.microsoft.com/office/powerpoint/2012/main"/>
+    </p:ext>
+  </p:extLst>
 </p:presentation>
 </file>
 
@@ -3321,6 +3329,53 @@
           <a:chExt cx="0" cy="0"/>
         </a:xfrm>
       </p:grpSpPr>
+      <p:pic>
+        <p:nvPicPr>
+          <p:cNvPr id="3076" name="Picture 4">
+            <a:extLst>
+              <a:ext uri="{FF2B5EF4-FFF2-40B4-BE49-F238E27FC236}">
+                <a16:creationId xmlns:a16="http://schemas.microsoft.com/office/drawing/2014/main" id="{0C1D9EB5-D91D-54CE-016B-0D31E57DD026}"/>
+              </a:ext>
+            </a:extLst>
+          </p:cNvPr>
+          <p:cNvPicPr>
+            <a:picLocks noChangeAspect="1" noChangeArrowheads="1"/>
+          </p:cNvPicPr>
+          <p:nvPr/>
+        </p:nvPicPr>
+        <p:blipFill>
+          <a:blip r:embed="rId2">
+            <a:extLst>
+              <a:ext uri="{28A0092B-C50C-407E-A947-70E740481C1C}">
+                <a14:useLocalDpi xmlns:a14="http://schemas.microsoft.com/office/drawing/2010/main" val="0"/>
+              </a:ext>
+            </a:extLst>
+          </a:blip>
+          <a:srcRect/>
+          <a:stretch>
+            <a:fillRect/>
+          </a:stretch>
+        </p:blipFill>
+        <p:spPr bwMode="auto">
+          <a:xfrm>
+            <a:off x="1257300" y="1260556"/>
+            <a:ext cx="2889250" cy="4336887"/>
+          </a:xfrm>
+          <a:prstGeom prst="rect">
+            <a:avLst/>
+          </a:prstGeom>
+          <a:noFill/>
+          <a:extLst>
+            <a:ext uri="{909E8E84-426E-40DD-AFC4-6F175D3DCCD1}">
+              <a14:hiddenFill xmlns:a14="http://schemas.microsoft.com/office/drawing/2010/main">
+                <a:solidFill>
+                  <a:srgbClr val="FFFFFF"/>
+                </a:solidFill>
+              </a14:hiddenFill>
+            </a:ext>
+          </a:extLst>
+        </p:spPr>
+      </p:pic>
       <p:sp>
         <p:nvSpPr>
           <p:cNvPr id="2" name="Titel 1">
@@ -3337,12 +3392,24 @@
             <p:ph type="ctrTitle"/>
           </p:nvPr>
         </p:nvSpPr>
-        <p:spPr/>
-        <p:txBody>
-          <a:bodyPr/>
-          <a:lstStyle/>
-          <a:p>
-            <a:endParaRPr lang="de-DE"/>
+        <p:spPr>
+          <a:xfrm>
+            <a:off x="3003550" y="1192213"/>
+            <a:ext cx="9144000" cy="2387600"/>
+          </a:xfrm>
+        </p:spPr>
+        <p:txBody>
+          <a:bodyPr/>
+          <a:lstStyle/>
+          <a:p>
+            <a:r>
+              <a:rPr lang="de-DE" dirty="0" err="1"/>
+              <a:t>Slarachae</a:t>
+            </a:r>
+            <a:r>
+              <a:rPr lang="de-DE" dirty="0"/>
+              <a:t> Games</a:t>
+            </a:r>
           </a:p>
         </p:txBody>
       </p:sp>
@@ -3362,12 +3429,22 @@
             <p:ph type="subTitle" idx="1"/>
           </p:nvPr>
         </p:nvSpPr>
-        <p:spPr/>
-        <p:txBody>
-          <a:bodyPr/>
-          <a:lstStyle/>
-          <a:p>
-            <a:endParaRPr lang="de-DE"/>
+        <p:spPr>
+          <a:xfrm>
+            <a:off x="1079500" y="3525838"/>
+            <a:ext cx="9144000" cy="1655762"/>
+          </a:xfrm>
+        </p:spPr>
+        <p:txBody>
+          <a:bodyPr>
+            <a:normAutofit/>
+          </a:bodyPr>
+          <a:lstStyle/>
+          <a:p>
+            <a:r>
+              <a:rPr lang="de-DE" sz="1600" dirty="0"/>
+              <a:t>By Noel &amp; Florian</a:t>
+            </a:r>
           </a:p>
         </p:txBody>
       </p:sp>
@@ -3375,6 +3452,521 @@
     <p:extLst>
       <p:ext uri="{BB962C8B-B14F-4D97-AF65-F5344CB8AC3E}">
         <p14:creationId xmlns:p14="http://schemas.microsoft.com/office/powerpoint/2010/main" val="2130477469"/>
+      </p:ext>
+    </p:extLst>
+  </p:cSld>
+  <p:clrMapOvr>
+    <a:masterClrMapping/>
+  </p:clrMapOvr>
+</p:sld>
+</file>
+
+<file path=ppt/slides/slide2.xml><?xml version="1.0" encoding="utf-8"?>
+<p:sld xmlns:a="http://schemas.openxmlformats.org/drawingml/2006/main" xmlns:r="http://schemas.openxmlformats.org/officeDocument/2006/relationships" xmlns:p="http://schemas.openxmlformats.org/presentationml/2006/main">
+  <p:cSld>
+    <p:spTree>
+      <p:nvGrpSpPr>
+        <p:cNvPr id="1" name="">
+          <a:extLst>
+            <a:ext uri="{FF2B5EF4-FFF2-40B4-BE49-F238E27FC236}">
+              <a16:creationId xmlns:a16="http://schemas.microsoft.com/office/drawing/2014/main" id="{05FAED08-7FA2-DC13-C9FB-728A9D7F5CDE}"/>
+            </a:ext>
+          </a:extLst>
+        </p:cNvPr>
+        <p:cNvGrpSpPr/>
+        <p:nvPr/>
+      </p:nvGrpSpPr>
+      <p:grpSpPr>
+        <a:xfrm>
+          <a:off x="0" y="0"/>
+          <a:ext cx="0" cy="0"/>
+          <a:chOff x="0" y="0"/>
+          <a:chExt cx="0" cy="0"/>
+        </a:xfrm>
+      </p:grpSpPr>
+      <p:pic>
+        <p:nvPicPr>
+          <p:cNvPr id="6" name="Grafik 5">
+            <a:extLst>
+              <a:ext uri="{FF2B5EF4-FFF2-40B4-BE49-F238E27FC236}">
+                <a16:creationId xmlns:a16="http://schemas.microsoft.com/office/drawing/2014/main" id="{3FF1C267-D482-8FAF-91B4-400139B37372}"/>
+              </a:ext>
+            </a:extLst>
+          </p:cNvPr>
+          <p:cNvPicPr>
+            <a:picLocks noChangeAspect="1"/>
+          </p:cNvPicPr>
+          <p:nvPr/>
+        </p:nvPicPr>
+        <p:blipFill>
+          <a:blip r:embed="rId2"/>
+          <a:stretch>
+            <a:fillRect/>
+          </a:stretch>
+        </p:blipFill>
+        <p:spPr>
+          <a:xfrm>
+            <a:off x="6331867" y="2012921"/>
+            <a:ext cx="4348833" cy="2832158"/>
+          </a:xfrm>
+          <a:prstGeom prst="rect">
+            <a:avLst/>
+          </a:prstGeom>
+        </p:spPr>
+      </p:pic>
+      <p:sp>
+        <p:nvSpPr>
+          <p:cNvPr id="2" name="Titel 1">
+            <a:extLst>
+              <a:ext uri="{FF2B5EF4-FFF2-40B4-BE49-F238E27FC236}">
+                <a16:creationId xmlns:a16="http://schemas.microsoft.com/office/drawing/2014/main" id="{316DDE62-CDDF-BE6E-F561-FBFDD6036770}"/>
+              </a:ext>
+            </a:extLst>
+          </p:cNvPr>
+          <p:cNvSpPr>
+            <a:spLocks noGrp="1"/>
+          </p:cNvSpPr>
+          <p:nvPr>
+            <p:ph type="title"/>
+          </p:nvPr>
+        </p:nvSpPr>
+        <p:spPr>
+          <a:xfrm>
+            <a:off x="839787" y="67205"/>
+            <a:ext cx="3932237" cy="1600200"/>
+          </a:xfrm>
+        </p:spPr>
+        <p:txBody>
+          <a:bodyPr/>
+          <a:lstStyle/>
+          <a:p>
+            <a:r>
+              <a:rPr lang="de-DE" dirty="0"/>
+              <a:t>Informieren</a:t>
+            </a:r>
+          </a:p>
+        </p:txBody>
+      </p:sp>
+      <p:sp>
+        <p:nvSpPr>
+          <p:cNvPr id="4" name="Textplatzhalter 3">
+            <a:extLst>
+              <a:ext uri="{FF2B5EF4-FFF2-40B4-BE49-F238E27FC236}">
+                <a16:creationId xmlns:a16="http://schemas.microsoft.com/office/drawing/2014/main" id="{0C510008-8F29-D38A-00C8-D4A192AA7D74}"/>
+              </a:ext>
+            </a:extLst>
+          </p:cNvPr>
+          <p:cNvSpPr>
+            <a:spLocks noGrp="1"/>
+          </p:cNvSpPr>
+          <p:nvPr>
+            <p:ph type="body" sz="half" idx="2"/>
+          </p:nvPr>
+        </p:nvSpPr>
+        <p:spPr/>
+        <p:txBody>
+          <a:bodyPr/>
+          <a:lstStyle/>
+          <a:p>
+            <a:pPr marL="285750" indent="-285750">
+              <a:buFont typeface="Wingdings" panose="05000000000000000000" pitchFamily="2" charset="2"/>
+              <a:buChar char="§"/>
+            </a:pPr>
+            <a:endParaRPr lang="de-DE" dirty="0"/>
+          </a:p>
+          <a:p>
+            <a:pPr marL="285750" indent="-285750">
+              <a:buFont typeface="Wingdings" panose="05000000000000000000" pitchFamily="2" charset="2"/>
+              <a:buChar char="§"/>
+            </a:pPr>
+            <a:r>
+              <a:rPr lang="de-DE" dirty="0"/>
+              <a:t>Ausgangslage analysieren</a:t>
+            </a:r>
+          </a:p>
+          <a:p>
+            <a:pPr marL="285750" indent="-285750">
+              <a:buFont typeface="Wingdings" panose="05000000000000000000" pitchFamily="2" charset="2"/>
+              <a:buChar char="§"/>
+            </a:pPr>
+            <a:endParaRPr lang="de-DE" dirty="0"/>
+          </a:p>
+          <a:p>
+            <a:pPr marL="285750" indent="-285750">
+              <a:buFont typeface="Wingdings" panose="05000000000000000000" pitchFamily="2" charset="2"/>
+              <a:buChar char="§"/>
+            </a:pPr>
+            <a:r>
+              <a:rPr lang="de-DE" dirty="0"/>
+              <a:t>Das</a:t>
+            </a:r>
+            <a:r>
+              <a:rPr lang="de-DE" dirty="0">
+                <a:solidFill>
+                  <a:srgbClr val="C00000"/>
+                </a:solidFill>
+              </a:rPr>
+              <a:t> I</a:t>
+            </a:r>
+            <a:r>
+              <a:rPr lang="de-DE" dirty="0">
+                <a:solidFill>
+                  <a:schemeClr val="accent2"/>
+                </a:solidFill>
+              </a:rPr>
+              <a:t>P</a:t>
+            </a:r>
+            <a:r>
+              <a:rPr lang="de-DE" dirty="0">
+                <a:solidFill>
+                  <a:srgbClr val="FFC000"/>
+                </a:solidFill>
+              </a:rPr>
+              <a:t>E</a:t>
+            </a:r>
+            <a:r>
+              <a:rPr lang="de-DE" dirty="0">
+                <a:solidFill>
+                  <a:srgbClr val="00B050"/>
+                </a:solidFill>
+              </a:rPr>
+              <a:t>R</a:t>
+            </a:r>
+            <a:r>
+              <a:rPr lang="de-DE" dirty="0">
+                <a:solidFill>
+                  <a:schemeClr val="accent3"/>
+                </a:solidFill>
+              </a:rPr>
+              <a:t>K</a:t>
+            </a:r>
+            <a:r>
+              <a:rPr lang="de-DE" dirty="0">
+                <a:solidFill>
+                  <a:srgbClr val="0070C0"/>
+                </a:solidFill>
+              </a:rPr>
+              <a:t>A</a:t>
+            </a:r>
+            <a:r>
+              <a:rPr lang="de-DE" dirty="0"/>
+              <a:t> verinnerlicht</a:t>
+            </a:r>
+          </a:p>
+          <a:p>
+            <a:endParaRPr lang="de-DE" dirty="0"/>
+          </a:p>
+          <a:p>
+            <a:pPr marL="285750" indent="-285750">
+              <a:buFont typeface="Wingdings" panose="05000000000000000000" pitchFamily="2" charset="2"/>
+              <a:buChar char="§"/>
+            </a:pPr>
+            <a:r>
+              <a:rPr lang="de-DE" dirty="0"/>
+              <a:t>Rollen verteilt</a:t>
+            </a:r>
+          </a:p>
+          <a:p>
+            <a:pPr marL="285750" indent="-285750">
+              <a:buFont typeface="Wingdings" panose="05000000000000000000" pitchFamily="2" charset="2"/>
+              <a:buChar char="§"/>
+            </a:pPr>
+            <a:endParaRPr lang="de-DE" dirty="0"/>
+          </a:p>
+          <a:p>
+            <a:pPr marL="285750" indent="-285750">
+              <a:buFont typeface="Wingdings" panose="05000000000000000000" pitchFamily="2" charset="2"/>
+              <a:buChar char="§"/>
+            </a:pPr>
+            <a:r>
+              <a:rPr lang="de-DE" dirty="0"/>
+              <a:t>Ziele definiert</a:t>
+            </a:r>
+          </a:p>
+          <a:p>
+            <a:endParaRPr lang="de-DE" dirty="0"/>
+          </a:p>
+        </p:txBody>
+      </p:sp>
+      <p:pic>
+        <p:nvPicPr>
+          <p:cNvPr id="2050" name="Picture 2" descr="Generiertes Bild">
+            <a:extLst>
+              <a:ext uri="{FF2B5EF4-FFF2-40B4-BE49-F238E27FC236}">
+                <a16:creationId xmlns:a16="http://schemas.microsoft.com/office/drawing/2014/main" id="{A9433072-ACD4-0EC7-9981-BCFC25143E02}"/>
+              </a:ext>
+            </a:extLst>
+          </p:cNvPr>
+          <p:cNvPicPr>
+            <a:picLocks noChangeAspect="1" noChangeArrowheads="1"/>
+          </p:cNvPicPr>
+          <p:nvPr/>
+        </p:nvPicPr>
+        <p:blipFill>
+          <a:blip r:embed="rId3">
+            <a:extLst>
+              <a:ext uri="{28A0092B-C50C-407E-A947-70E740481C1C}">
+                <a14:useLocalDpi xmlns:a14="http://schemas.microsoft.com/office/drawing/2010/main" val="0"/>
+              </a:ext>
+            </a:extLst>
+          </a:blip>
+          <a:srcRect/>
+          <a:stretch>
+            <a:fillRect/>
+          </a:stretch>
+        </p:blipFill>
+        <p:spPr bwMode="auto">
+          <a:xfrm>
+            <a:off x="4159250" y="867305"/>
+            <a:ext cx="8300243" cy="5533495"/>
+          </a:xfrm>
+          <a:prstGeom prst="rect">
+            <a:avLst/>
+          </a:prstGeom>
+          <a:noFill/>
+          <a:extLst>
+            <a:ext uri="{909E8E84-426E-40DD-AFC4-6F175D3DCCD1}">
+              <a14:hiddenFill xmlns:a14="http://schemas.microsoft.com/office/drawing/2010/main">
+                <a:solidFill>
+                  <a:srgbClr val="FFFFFF"/>
+                </a:solidFill>
+              </a14:hiddenFill>
+            </a:ext>
+          </a:extLst>
+        </p:spPr>
+      </p:pic>
+    </p:spTree>
+    <p:extLst>
+      <p:ext uri="{BB962C8B-B14F-4D97-AF65-F5344CB8AC3E}">
+        <p14:creationId xmlns:p14="http://schemas.microsoft.com/office/powerpoint/2010/main" val="2530535334"/>
+      </p:ext>
+    </p:extLst>
+  </p:cSld>
+  <p:clrMapOvr>
+    <a:masterClrMapping/>
+  </p:clrMapOvr>
+</p:sld>
+</file>
+
+<file path=ppt/slides/slide3.xml><?xml version="1.0" encoding="utf-8"?>
+<p:sld xmlns:a="http://schemas.openxmlformats.org/drawingml/2006/main" xmlns:r="http://schemas.openxmlformats.org/officeDocument/2006/relationships" xmlns:p="http://schemas.openxmlformats.org/presentationml/2006/main">
+  <p:cSld>
+    <p:spTree>
+      <p:nvGrpSpPr>
+        <p:cNvPr id="1" name="">
+          <a:extLst>
+            <a:ext uri="{FF2B5EF4-FFF2-40B4-BE49-F238E27FC236}">
+              <a16:creationId xmlns:a16="http://schemas.microsoft.com/office/drawing/2014/main" id="{E1D77E9A-52FD-4553-476E-D1AFEF329490}"/>
+            </a:ext>
+          </a:extLst>
+        </p:cNvPr>
+        <p:cNvGrpSpPr/>
+        <p:nvPr/>
+      </p:nvGrpSpPr>
+      <p:grpSpPr>
+        <a:xfrm>
+          <a:off x="0" y="0"/>
+          <a:ext cx="0" cy="0"/>
+          <a:chOff x="0" y="0"/>
+          <a:chExt cx="0" cy="0"/>
+        </a:xfrm>
+      </p:grpSpPr>
+      <p:sp>
+        <p:nvSpPr>
+          <p:cNvPr id="2" name="Titel 1">
+            <a:extLst>
+              <a:ext uri="{FF2B5EF4-FFF2-40B4-BE49-F238E27FC236}">
+                <a16:creationId xmlns:a16="http://schemas.microsoft.com/office/drawing/2014/main" id="{EE53AD2F-DDC2-FDF9-A127-B9B294A3E534}"/>
+              </a:ext>
+            </a:extLst>
+          </p:cNvPr>
+          <p:cNvSpPr>
+            <a:spLocks noGrp="1"/>
+          </p:cNvSpPr>
+          <p:nvPr>
+            <p:ph type="title"/>
+          </p:nvPr>
+        </p:nvSpPr>
+        <p:spPr/>
+        <p:txBody>
+          <a:bodyPr/>
+          <a:lstStyle/>
+          <a:p>
+            <a:r>
+              <a:rPr lang="de-DE" dirty="0"/>
+              <a:t>Planen</a:t>
+            </a:r>
+          </a:p>
+        </p:txBody>
+      </p:sp>
+      <p:sp>
+        <p:nvSpPr>
+          <p:cNvPr id="3" name="Bildplatzhalter 2">
+            <a:extLst>
+              <a:ext uri="{FF2B5EF4-FFF2-40B4-BE49-F238E27FC236}">
+                <a16:creationId xmlns:a16="http://schemas.microsoft.com/office/drawing/2014/main" id="{76EC8842-8209-66E5-1144-BB7EBDB45B4D}"/>
+              </a:ext>
+            </a:extLst>
+          </p:cNvPr>
+          <p:cNvSpPr>
+            <a:spLocks noGrp="1"/>
+          </p:cNvSpPr>
+          <p:nvPr>
+            <p:ph type="pic" idx="1"/>
+          </p:nvPr>
+        </p:nvSpPr>
+        <p:spPr/>
+        <p:txBody>
+          <a:bodyPr/>
+          <a:lstStyle/>
+          <a:p>
+            <a:endParaRPr lang="de-DE"/>
+          </a:p>
+        </p:txBody>
+      </p:sp>
+      <p:sp>
+        <p:nvSpPr>
+          <p:cNvPr id="4" name="Textplatzhalter 3">
+            <a:extLst>
+              <a:ext uri="{FF2B5EF4-FFF2-40B4-BE49-F238E27FC236}">
+                <a16:creationId xmlns:a16="http://schemas.microsoft.com/office/drawing/2014/main" id="{AA61F716-5382-4CDB-3991-534975BF45DE}"/>
+              </a:ext>
+            </a:extLst>
+          </p:cNvPr>
+          <p:cNvSpPr>
+            <a:spLocks noGrp="1"/>
+          </p:cNvSpPr>
+          <p:nvPr>
+            <p:ph type="body" sz="half" idx="2"/>
+          </p:nvPr>
+        </p:nvSpPr>
+        <p:spPr/>
+        <p:txBody>
+          <a:bodyPr/>
+          <a:lstStyle/>
+          <a:p>
+            <a:endParaRPr lang="de-DE"/>
+          </a:p>
+        </p:txBody>
+      </p:sp>
+    </p:spTree>
+    <p:extLst>
+      <p:ext uri="{BB962C8B-B14F-4D97-AF65-F5344CB8AC3E}">
+        <p14:creationId xmlns:p14="http://schemas.microsoft.com/office/powerpoint/2010/main" val="1688434866"/>
+      </p:ext>
+    </p:extLst>
+  </p:cSld>
+  <p:clrMapOvr>
+    <a:masterClrMapping/>
+  </p:clrMapOvr>
+</p:sld>
+</file>
+
+<file path=ppt/slides/slide4.xml><?xml version="1.0" encoding="utf-8"?>
+<p:sld xmlns:a="http://schemas.openxmlformats.org/drawingml/2006/main" xmlns:r="http://schemas.openxmlformats.org/officeDocument/2006/relationships" xmlns:p="http://schemas.openxmlformats.org/presentationml/2006/main">
+  <p:cSld>
+    <p:spTree>
+      <p:nvGrpSpPr>
+        <p:cNvPr id="1" name="">
+          <a:extLst>
+            <a:ext uri="{FF2B5EF4-FFF2-40B4-BE49-F238E27FC236}">
+              <a16:creationId xmlns:a16="http://schemas.microsoft.com/office/drawing/2014/main" id="{513A0D2E-6D21-A514-7383-58BEA1440DB6}"/>
+            </a:ext>
+          </a:extLst>
+        </p:cNvPr>
+        <p:cNvGrpSpPr/>
+        <p:nvPr/>
+      </p:nvGrpSpPr>
+      <p:grpSpPr>
+        <a:xfrm>
+          <a:off x="0" y="0"/>
+          <a:ext cx="0" cy="0"/>
+          <a:chOff x="0" y="0"/>
+          <a:chExt cx="0" cy="0"/>
+        </a:xfrm>
+      </p:grpSpPr>
+      <p:sp>
+        <p:nvSpPr>
+          <p:cNvPr id="2" name="Titel 1">
+            <a:extLst>
+              <a:ext uri="{FF2B5EF4-FFF2-40B4-BE49-F238E27FC236}">
+                <a16:creationId xmlns:a16="http://schemas.microsoft.com/office/drawing/2014/main" id="{432E49CA-F322-97CE-6921-4EBF603F27DA}"/>
+              </a:ext>
+            </a:extLst>
+          </p:cNvPr>
+          <p:cNvSpPr>
+            <a:spLocks noGrp="1"/>
+          </p:cNvSpPr>
+          <p:nvPr>
+            <p:ph type="title"/>
+          </p:nvPr>
+        </p:nvSpPr>
+        <p:spPr/>
+        <p:txBody>
+          <a:bodyPr/>
+          <a:lstStyle/>
+          <a:p>
+            <a:r>
+              <a:rPr lang="de-DE" dirty="0"/>
+              <a:t>Entscheiden</a:t>
+            </a:r>
+          </a:p>
+        </p:txBody>
+      </p:sp>
+      <p:sp>
+        <p:nvSpPr>
+          <p:cNvPr id="3" name="Bildplatzhalter 2">
+            <a:extLst>
+              <a:ext uri="{FF2B5EF4-FFF2-40B4-BE49-F238E27FC236}">
+                <a16:creationId xmlns:a16="http://schemas.microsoft.com/office/drawing/2014/main" id="{99930ECA-F4E0-52BC-F855-5F053C741E92}"/>
+              </a:ext>
+            </a:extLst>
+          </p:cNvPr>
+          <p:cNvSpPr>
+            <a:spLocks noGrp="1"/>
+          </p:cNvSpPr>
+          <p:nvPr>
+            <p:ph type="pic" idx="1"/>
+          </p:nvPr>
+        </p:nvSpPr>
+        <p:spPr/>
+        <p:txBody>
+          <a:bodyPr/>
+          <a:lstStyle/>
+          <a:p>
+            <a:endParaRPr lang="de-DE"/>
+          </a:p>
+        </p:txBody>
+      </p:sp>
+      <p:sp>
+        <p:nvSpPr>
+          <p:cNvPr id="4" name="Textplatzhalter 3">
+            <a:extLst>
+              <a:ext uri="{FF2B5EF4-FFF2-40B4-BE49-F238E27FC236}">
+                <a16:creationId xmlns:a16="http://schemas.microsoft.com/office/drawing/2014/main" id="{ADC7C060-A64E-8F98-8894-F5B5EA33A100}"/>
+              </a:ext>
+            </a:extLst>
+          </p:cNvPr>
+          <p:cNvSpPr>
+            <a:spLocks noGrp="1"/>
+          </p:cNvSpPr>
+          <p:nvPr>
+            <p:ph type="body" sz="half" idx="2"/>
+          </p:nvPr>
+        </p:nvSpPr>
+        <p:spPr/>
+        <p:txBody>
+          <a:bodyPr/>
+          <a:lstStyle/>
+          <a:p>
+            <a:endParaRPr lang="de-DE"/>
+          </a:p>
+        </p:txBody>
+      </p:sp>
+    </p:spTree>
+    <p:extLst>
+      <p:ext uri="{BB962C8B-B14F-4D97-AF65-F5344CB8AC3E}">
+        <p14:creationId xmlns:p14="http://schemas.microsoft.com/office/powerpoint/2010/main" val="3105910166"/>
       </p:ext>
     </p:extLst>
   </p:cSld>
